--- a/Planning docs/Slides/lesson-22-4-teacher-slides.pptx
+++ b/Planning docs/Slides/lesson-22-4-teacher-slides.pptx
@@ -517,7 +517,7 @@
           <a:p>
             <a:r>
               <a:rPr lang="en-US" dirty="0"/>
-              <a:t>Lesson 22.4. Reading: Synthesis: Publish + Celebrate.</a:t>
+              <a:t>Lesson 22.4. Reading: Publish + Celebrate.</a:t>
             </a:r>
             <a:endParaRPr lang="en-US" dirty="0"/>
           </a:p>
@@ -2320,7 +2320,7 @@
                 <a:ea typeface="Calibri" pitchFamily="34" charset="-122"/>
                 <a:cs typeface="Calibri" pitchFamily="34" charset="-120"/>
               </a:rPr>
-              <a:t>Lesson 22.4  ·  Synthesis: Publish + Celebrate</a:t>
+              <a:t>Lesson 22.4  ·  Publish + Celebrate</a:t>
             </a:r>
             <a:endParaRPr lang="en-US" sz="2000" dirty="0"/>
           </a:p>
@@ -4980,7 +4980,7 @@
                 <a:ea typeface="Calibri" pitchFamily="34" charset="-122"/>
                 <a:cs typeface="Calibri" pitchFamily="34" charset="-120"/>
               </a:rPr>
-              <a:t>Synthesis: Publish + Celebrate</a:t>
+              <a:t>Publish + Celebrate</a:t>
             </a:r>
             <a:endParaRPr lang="en-US" sz="2600" dirty="0"/>
           </a:p>
@@ -5058,7 +5058,7 @@
                 <a:ea typeface="Calibri" pitchFamily="34" charset="-122"/>
                 <a:cs typeface="Calibri" pitchFamily="34" charset="-120"/>
               </a:rPr>
-              <a:t>•  Good readers carry a book with them even after they close the cover. Today we celebrate what we've read, share our thinking, and reflect on what we'll take away.</a:t>
+              <a:t>•  Which character changed the most — Jemmy or Prince Brat? What is your best evidence?</a:t>
             </a:r>
             <a:endParaRPr lang="en-US" sz="1500" dirty="0"/>
           </a:p>
@@ -5075,24 +5075,7 @@
                 <a:ea typeface="Calibri" pitchFamily="34" charset="-122"/>
                 <a:cs typeface="Calibri" pitchFamily="34" charset="-120"/>
               </a:rPr>
-              <a:t>•  Rossetti could have written “do not step on bugs.” Explain why giving the cricket a cheerful voice makes the poem harder to ignore.</a:t>
-            </a:r>
-            <a:endParaRPr lang="en-US" sz="1500" dirty="0"/>
-          </a:p>
-          <a:p>
-            <a:pPr indent="0" marL="0">
-              <a:buNone/>
-            </a:pPr>
-            <a:r>
-              <a:rPr lang="en-US" sz="1500" dirty="0">
-                <a:solidFill>
-                  <a:srgbClr val="1E293B"/>
-                </a:solidFill>
-                <a:latin typeface="Calibri" pitchFamily="34" charset="0"/>
-                <a:ea typeface="Calibri" pitchFamily="34" charset="-122"/>
-                <a:cs typeface="Calibri" pitchFamily="34" charset="-120"/>
-              </a:rPr>
-              <a:t>•  Look at the letters around the dot in each word. Count: vowel, consonant, consonant, vowel. That's the VCCV pattern .</a:t>
+              <a:t>•  If you could tell Sid Fleischman one thing about reading The Whipping Boy, what would it be?</a:t>
             </a:r>
             <a:endParaRPr lang="en-US" sz="1500" dirty="0"/>
           </a:p>
@@ -6248,7 +6231,7 @@
                 <a:ea typeface="Calibri" pitchFamily="34" charset="-122"/>
                 <a:cs typeface="Calibri" pitchFamily="34" charset="-120"/>
               </a:rPr>
-              <a:t>Synthesis: Publish + Celebrate</a:t>
+              <a:t>Publish + Celebrate</a:t>
             </a:r>
             <a:endParaRPr lang="en-US" sz="2000" dirty="0"/>
           </a:p>
